--- a/plans/ppt/TW-SELFSELECT台股買賣自動化系統-W3-講稿版.pptx
+++ b/plans/ppt/TW-SELFSELECT台股買賣自動化系統-W3-講稿版.pptx
@@ -501,7 +501,7 @@
           </a:p>
           <a:p>
             <a:r>
-              <a:t>前兩週我們把環境建好了，也認識了 Python。這一週是整個課程的轉折點——我們要正式認識我們的「主力同事」：Opencode。學會怎麼跟它下指令，之後所有程式都交給它寫。</a:t>
+              <a:t>前兩週我們把環境建好了，也認識了 Python。這一週是整個課程的轉折點——我們要正式認識我們的「主力同事」：DSH。學會怎麼跟它下指令，之後所有程式都交給它寫。</a:t>
             </a:r>
           </a:p>
           <a:p>
@@ -1535,7 +1535,7 @@
           <a:p/>
           <a:p>
             <a:r>
-              <a:t>接下來介紹一個進階功能：Prometheus Plan Builder。</a:t>
+              <a:t>使用 DSH 的 plan 模式</a:t>
             </a:r>
           </a:p>
           <a:p>
@@ -1632,12 +1632,12 @@
           </a:p>
           <a:p>
             <a:r>
-              <a:t>第一，請確定你的 ~/.bashrc 裡面的 Finmind API 已經設好；還有 ~/.local/share/opencode/auth.json 裡面的 OpenRouter 以及 Nvidia 的 API key 也都設好了。這些是 AI 的通行證，沒設好 AI 不會回應。</a:t>
-            </a:r>
-          </a:p>
-          <a:p>
-            <a:r>
-              <a:t>然後在 WSL 中先執行 activate_venv 啟動虛擬環境，接著在 tw-autotrader 目錄下執行 opencode。啟動之後，用 Tab 鍵可以選擇模式——一般使用建議選 Sisyphus Ultraworker；規劃階段用 Prometheus Plan Builder，先建好計畫再執行。</a:t>
+              <a:t>第一，請確定 DSH 可以正常啟動（本課程用 deepseek-flash）。FinMind 的 API token 放在專案的 .env 裡（FINMIND_API_TOKEN）——DSH 執行專案腳本時會直接讀到，不需要另外設定。</a:t>
+            </a:r>
+          </a:p>
+          <a:p>
+            <a:r>
+              <a:t>在專案根目錄啟動 dsh_web（瀏覽器開 http://127.0.0.1:3080）。一般任務直接對話；規劃階段用 plan 模式，先確認計畫再執行。</a:t>
             </a:r>
           </a:p>
           <a:p>
@@ -1648,7 +1648,7 @@
           <a:p/>
           <a:p>
             <a:r>
-              <a:t>【講師提示】這是操作頁，現場示範啟動流程，確認每位學員的 API key 都生效。</a:t>
+              <a:t>確認每位學員的 DSH 都能正常回應（打一句「我們溝通都用繁中」看看）。</a:t>
             </a:r>
           </a:p>
         </p:txBody>
@@ -1729,7 +1729,7 @@
           </a:p>
           <a:p>
             <a:r>
-              <a:t>在 opencode 輸入 /start-work 就會依照計畫開始執行。如果執行過程中有問題，可以直接切換到 Ultraworker 模式處理。任務完成後，opencode 會發出聲音提示你——所以不用一直盯著螢幕。</a:t>
+              <a:t>確認計畫後 DSH 就會開始執行；過程中有問題直接在對話追加指示，或切回 plan 模式重新規劃。完成後在介面看得到結果；長時間任務可用 goal 讓它分回合續跑，不用一直盯著螢幕。</a:t>
             </a:r>
           </a:p>
           <a:p>
@@ -1913,12 +1913,12 @@
           <a:p/>
           <a:p>
             <a:r>
-              <a:t>這一頁，讓大家看看 Opencode 實際幫我們產出的知識沉澱檔案。</a:t>
-            </a:r>
-          </a:p>
-          <a:p>
-            <a:r>
-              <a:t>畫面上是 ~/tw-autotrader/cairn/ 底下的 backtest-data-pitfalls.MD——這是 Opencode 自動產生的檔案。內容記錄了 2026-08 回測數字無法重現事件的完整教訓：症狀、根因、還有目前的防護措施。</a:t>
+              <a:t>這一頁，讓大家看看 DSH 實際幫我們產出的知識沉澱檔案。</a:t>
+            </a:r>
+          </a:p>
+          <a:p>
+            <a:r>
+              <a:t>畫面上是 ~/tw-selfselect/cairn/ 底下的 backtest-data-pitfalls.MD——這是 DSH 自動產生的檔案。內容記錄了 2026-08 回測數字無法重現事件的完整教訓：症狀、根因、還有目前的防護措施。</a:t>
             </a:r>
           </a:p>
           <a:p>
@@ -1928,7 +1928,7 @@
           </a:p>
           <a:p>
             <a:r>
-              <a:t>重點是：這些內容不是老師手寫的，是修完 bug 之後 Opencode 自動沉澱下來的。下次開新 session，AI 一進專案就會讀到，同樣的坑就不會再踩。</a:t>
+              <a:t>重點是：這些內容不是老師手寫的，是修完 bug 之後 DSH 自動沉澱下來的。下次開新 session，AI 一進專案就會讀到，同樣的坑就不會再踩。</a:t>
             </a:r>
           </a:p>
           <a:p>
@@ -1939,7 +1939,7 @@
           <a:p/>
           <a:p>
             <a:r>
-              <a:t>【講師提示】現場打開 ~/tw-autotrader/cairn/ 目錄展示真實檔案（AGENTS.md、LOG.md、backtest-data-pitfalls.md），讓學員知道之後他們的專案也會自動長出這些知識檔。</a:t>
+              <a:t>【講師提示】現場打開 ~/tw-selfselect/cairn/ 目錄展示真實檔案（AGENTS.md、LOG.md、backtest-data-pitfalls.md），讓學員知道之後他們的專案也會自動長出這些知識檔。</a:t>
             </a:r>
           </a:p>
         </p:txBody>
@@ -2117,7 +2117,7 @@
           </a:p>
           <a:p>
             <a:r>
-              <a:t>請大家自行練習使用 opencode 下指令——越熟練，之後的策略課程越輕鬆。我是 frank，信箱是 frank@dinchen.com.tw，有問題歡迎寫信。</a:t>
+              <a:t>請大家自行練習使用 DSH 下指令——越熟練，之後的策略課程越輕鬆。我是 frank，信箱是 frank@dinchen.com.tw，有問題歡迎寫信。</a:t>
             </a:r>
           </a:p>
           <a:p>
@@ -2209,27 +2209,11 @@
           <a:p/>
           <a:p>
             <a:r>
-              <a:t>接下來講模型選擇。</a:t>
-            </a:r>
-          </a:p>
-          <a:p>
-            <a:r>
-              <a:t>在 opencode 裡面，按 Ctrl 加 P 可以更換模型。建議選 Deepseek V4 Flash——一般問題 Flash 就夠了；比較複雜的問題可以換成 Deepseek V4 PRO。</a:t>
-            </a:r>
-          </a:p>
-          <a:p>
-            <a:r>
-              <a:t>這裡有個強烈建議：如果你使用 Deepseek V4 Flash 或 PRO，同一段對話中，不要混用其他廠家的 AI 模型。為什麼？因為不同模型對同樣問題的理解不同，混用容易讓對話邏輯亂掉，也影響後續的費用——這點我們最後一頁會再講。</a:t>
-            </a:r>
-          </a:p>
-          <a:p>
-            <a:r>
-              <a:t>預算方面，可以先用 Nvidia 或其他家的免費 Deepseek V4 額度，免費額度用完之後，再使用付費的 Deepseek V4。</a:t>
-            </a:r>
-          </a:p>
-          <a:p>
-            <a:r>
-              <a:t>---</a:t>
+              <a:t>接下來講模型選擇。在 DSH 的 Web 介面可以切換模型；本課程統一用 deepseek-flash——一般問題夠用，較複雜再換更大的模型。</a:t>
+            </a:r>
+            <a:br/>
+            <a:r>
+              <a:t>強烈建議同一段對話不要混用其他廠牌模型：不同模型的理解不同，混用容易讓邏輯亂掉，也影響費用。</a:t>
             </a:r>
           </a:p>
           <a:p/>
@@ -2311,28 +2295,43 @@
           <a:p/>
           <a:p>
             <a:r>
-              <a:t>這頁是 opencode 的常用指令速查。</a:t>
-            </a:r>
-          </a:p>
-          <a:p>
-            <a:r>
-              <a:t>首先，打入「我們溝通都用繁中」，確定 AI 回應之後，代表 API 已經接上了。</a:t>
-            </a:r>
-          </a:p>
-          <a:p>
-            <a:r>
-              <a:t>接著幾個指令要記住：輸入 /exit 離開；/init 起始工作目錄——你的 tw-autotrader 已經 init 過了；/Finmind 呼叫 Finmind 技能，之後我們會很常用；如果想要回到某個工作段落，可以用 opencode 加 -s 參數，後面接 session 的編號；另外，在 WSL 中輸入 opencode_web，可以打開視窗版的 opencode。</a:t>
-            </a:r>
-          </a:p>
-          <a:p>
-            <a:r>
-              <a:t>---</a:t>
+              <a:t>這頁是 DSH 的常用操作速查：</a:t>
+            </a:r>
+          </a:p>
+          <a:p>
+            <a:r>
+              <a:t>① 啟動：dsh_web（＝pnpm dsh web）→ 瀏覽器開 http://127.0.0.1:3080</a:t>
+            </a:r>
+          </a:p>
+          <a:p>
+            <a:r>
+              <a:t>② 先打一句「我們溝通都用繁中」，AI 有回應就代表設定好了</a:t>
+            </a:r>
+          </a:p>
+          <a:p>
+            <a:r>
+              <a:t>③ 接續先前對話：Web 介面左側的 session 清單</a:t>
+            </a:r>
+          </a:p>
+          <a:p>
+            <a:r>
+              <a:t>④ 技能（skills）：直接用自然語言描述，例如「用 finmind 抓台積電月營收」</a:t>
+            </a:r>
+          </a:p>
+          <a:p>
+            <a:r>
+              <a:t>⑤ 重要／不可逆的動作：先切到 plan 模式，DSH 會先送計畫給你核准</a:t>
+            </a:r>
+          </a:p>
+          <a:p>
+            <a:r>
+              <a:t>⑥ 進度沉澱：寫進專案的 cairn/LOG.md</a:t>
             </a:r>
           </a:p>
           <a:p/>
           <a:p>
             <a:r>
-              <a:t>【講師提示】這頁是指令速查表，建議讓學員抄下來或截圖，之後每週都會用到。</a:t>
+              <a:t>【講師提示】這頁是操作速查表，建議讓學員抄下來或截圖，之後每週都會用到。</a:t>
             </a:r>
           </a:p>
         </p:txBody>
@@ -2408,22 +2407,7 @@
           <a:p/>
           <a:p>
             <a:r>
-              <a:t>現在實際操作。</a:t>
-            </a:r>
-          </a:p>
-          <a:p>
-            <a:r>
-              <a:t>啟動 opencode 之後，第一步：選擇工作目錄，選 tw-autotrader；第二步：選定模式，Ultraworker；第三步：選定模型，Deepseek V4 Flash。</a:t>
-            </a:r>
-          </a:p>
-          <a:p>
-            <a:r>
-              <a:t>三個步驟，就完成開場設定。</a:t>
-            </a:r>
-          </a:p>
-          <a:p>
-            <a:r>
-              <a:t>---</a:t>
+              <a:t>現在實際操作。第一步：把工作目錄開到專案根 ~/tw-selfselect；第二步：一般對話模式直接下指令；第三步：模型選 deepseek-flash。三個步驟就完成開場設定。</a:t>
             </a:r>
           </a:p>
           <a:p/>
@@ -2510,7 +2494,7 @@
           </a:p>
           <a:p>
             <a:r>
-              <a:t>新增之後，第一句話建議先提醒 Opencode：請用 WSL 底下的 tw-autotrader 當作工作根目錄。這樣 AI 才能正確掃描專案檔案，針對你的專案回答問題——這跟一般聊天型 AI 最大的不同就在這裡。</a:t>
+              <a:t>新增之後，第一句話建議先提醒 DSH：用 WSL 的 ~/tw-selfselect 當工作根目錄。這樣 AI 才能正確掃描專案檔案，針對你的專案回答問題——這跟一般聊天型 AI 最大的不同就在這裡。</a:t>
             </a:r>
           </a:p>
           <a:p>
@@ -2521,7 +2505,7 @@
           <a:p/>
           <a:p>
             <a:r>
-              <a:t>【講師提示】強調「工作根目錄」概念，這是 Opencode 能回答專案問題的關鍵。</a:t>
+              <a:t>【講師提示】強調「工作根目錄」概念，這是 DSH 能回答專案問題的關鍵。</a:t>
             </a:r>
           </a:p>
         </p:txBody>
@@ -2796,7 +2780,7 @@
           </a:p>
           <a:p>
             <a:r>
-              <a:t>輸入「/finmind 給我聯發科一到六月的 K 線圖 HTML 檔，放在 img 下」。AI 已經生成在 tw-autotrader 的 img 資料夾裡。</a:t>
+              <a:t>AI 已經生成在 tw-selfselect 的 img 資料夾裡。</a:t>
             </a:r>
           </a:p>
           <a:p>
@@ -13501,7 +13485,7 @@
                 <a:uFillTx/>
                 <a:latin typeface="Century Gothic"/>
               </a:rPr>
-              <a:t>使用</a:t>
+              <a:t>使用 Python 與 DSH</a:t>
             </a:r>
             <a:r>
               <a:rPr lang="en-US" sz="2400" b="0" u="none" strike="noStrike">
@@ -13515,7 +13499,7 @@
                 <a:uFillTx/>
                 <a:latin typeface="Century Gothic"/>
               </a:rPr>
-              <a:t>Python</a:t>
+              <a:t/>
             </a:r>
             <a:r>
               <a:rPr lang="zh-TW" sz="2400" b="0" u="none" strike="noStrike">
@@ -13529,7 +13513,7 @@
                 <a:uFillTx/>
                 <a:latin typeface="Century Gothic"/>
               </a:rPr>
-              <a:t>與</a:t>
+              <a:t/>
             </a:r>
             <a:r>
               <a:rPr lang="en-US" sz="2400" b="0" u="none" strike="noStrike">
@@ -13543,7 +13527,7 @@
                 <a:uFillTx/>
                 <a:latin typeface="Century Gothic"/>
               </a:rPr>
-              <a:t>Opencode AI</a:t>
+              <a:t/>
             </a:r>
             <a:endParaRPr lang="en-US" sz="2400" b="0" u="none" strike="noStrike">
               <a:solidFill>
@@ -13897,7 +13881,7 @@
                 <a:latin typeface="Century Gothic"/>
                 <a:ea typeface="Century Gothic"/>
               </a:rPr>
-              <a:t>~/tw-autotrader/img/mtk_kline_2026_h1.html</a:t>
+              <a:t>~/tw-selfselect/img/mtk_kline_2026_h1.html</a:t>
             </a:r>
             <a:r>
               <a:rPr lang="zh-TW" sz="1700" b="0" u="none" strike="noStrike">
@@ -23563,7 +23547,7 @@
                 <a:uFillTx/>
                 <a:latin typeface="Century Gothic"/>
               </a:rPr>
-              <a:t>使用</a:t>
+              <a:t>使用 DSH 的 plan 模式</a:t>
             </a:r>
             <a:r>
               <a:rPr lang="en-US" sz="3200" b="1" u="none" strike="noStrike">
@@ -23577,7 +23561,7 @@
                 <a:uFillTx/>
                 <a:latin typeface="Century Gothic"/>
               </a:rPr>
-              <a:t>Prometheus Plan Builder</a:t>
+              <a:t/>
             </a:r>
             <a:endParaRPr lang="en-US" sz="3200" b="1" u="none" strike="noStrike">
               <a:solidFill>
@@ -23981,7 +23965,7 @@
                 <a:uFillTx/>
                 <a:latin typeface="Century Gothic"/>
               </a:rPr>
-              <a:t>關於</a:t>
+              <a:t>關於 DSH</a:t>
             </a:r>
             <a:r>
               <a:rPr lang="en-US" sz="3200" b="1" u="none" strike="noStrike">
@@ -23995,7 +23979,7 @@
                 <a:uFillTx/>
                 <a:latin typeface="Century Gothic"/>
               </a:rPr>
-              <a:t>opencode</a:t>
+              <a:t/>
             </a:r>
             <a:endParaRPr lang="en-US" sz="3200" b="1" u="none" strike="noStrike">
               <a:solidFill>
@@ -24144,7 +24128,7 @@
                 <a:latin typeface="Century Gothic"/>
                 <a:ea typeface="Century Gothic"/>
               </a:rPr>
-              <a:t>請先確定</a:t>
+              <a:t>請先確定 DSH 可以正常啟動（本課程用 deepseek-flash）；FinMind 的 API token 放在專案 .env 的 FINMIND_API_TOKEN</a:t>
             </a:r>
             <a:r>
               <a:rPr lang="en-US" sz="1800" b="0" u="none" strike="noStrike">
@@ -24159,7 +24143,7 @@
                 <a:latin typeface="Century Gothic"/>
                 <a:ea typeface="Century Gothic"/>
               </a:rPr>
-              <a:t>,~/.bashrc</a:t>
+              <a:t/>
             </a:r>
             <a:r>
               <a:rPr lang="zh-TW" sz="1800" b="0" u="none" strike="noStrike">
@@ -24174,7 +24158,7 @@
                 <a:latin typeface="Century Gothic"/>
                 <a:ea typeface="Century Gothic"/>
               </a:rPr>
-              <a:t>中的</a:t>
+              <a:t/>
             </a:r>
             <a:r>
               <a:rPr lang="en-US" sz="1800" b="0" u="none" strike="noStrike">
@@ -24189,7 +24173,7 @@
                 <a:latin typeface="Century Gothic"/>
                 <a:ea typeface="Century Gothic"/>
               </a:rPr>
-              <a:t>Finmind API, ~/.local/share/opencode/auth.sh openrouter </a:t>
+              <a:t/>
             </a:r>
             <a:r>
               <a:rPr lang="zh-TW" sz="1800" b="0" u="none" strike="noStrike">
@@ -24204,7 +24188,7 @@
                 <a:latin typeface="Century Gothic"/>
                 <a:ea typeface="Century Gothic"/>
               </a:rPr>
-              <a:t>及</a:t>
+              <a:t/>
             </a:r>
             <a:r>
               <a:rPr lang="en-US" sz="1800" b="0" u="none" strike="noStrike">
@@ -24219,7 +24203,7 @@
                 <a:latin typeface="Century Gothic"/>
                 <a:ea typeface="Century Gothic"/>
               </a:rPr>
-              <a:t>nvidia</a:t>
+              <a:t/>
             </a:r>
             <a:r>
               <a:rPr lang="zh-TW" sz="1800" b="0" u="none" strike="noStrike">
@@ -24234,7 +24218,7 @@
                 <a:latin typeface="Century Gothic"/>
                 <a:ea typeface="Century Gothic"/>
               </a:rPr>
-              <a:t>的</a:t>
+              <a:t/>
             </a:r>
             <a:r>
               <a:rPr lang="en-US" sz="1800" b="0" u="none" strike="noStrike">
@@ -24249,7 +24233,7 @@
                 <a:latin typeface="Century Gothic"/>
                 <a:ea typeface="Century Gothic"/>
               </a:rPr>
-              <a:t>API key</a:t>
+              <a:t/>
             </a:r>
             <a:r>
               <a:rPr lang="zh-TW" sz="1800" b="0" u="none" strike="noStrike">
@@ -24264,7 +24248,7 @@
                 <a:latin typeface="Century Gothic"/>
                 <a:ea typeface="Century Gothic"/>
               </a:rPr>
-              <a:t>已經設好</a:t>
+              <a:t/>
             </a:r>
             <a:endParaRPr lang="en-US" sz="1800" b="0" u="none" strike="noStrike">
               <a:solidFill>
@@ -24378,7 +24362,7 @@
                 <a:latin typeface="Century Gothic"/>
                 <a:ea typeface="Century Gothic"/>
               </a:rPr>
-              <a:t>然後於</a:t>
+              <a:t>在專案根目錄啟動 DSH：dsh_web（即 pnpm dsh web，瀏覽器開 http://127.0.0.1:3080）；一般任務直接對話，重要或不可逆的動作先用 plan 模式（DSH 會先送計畫給你核准）</a:t>
             </a:r>
             <a:r>
               <a:rPr lang="en-US" sz="1800" b="0" u="none" strike="noStrike">
@@ -24393,7 +24377,7 @@
                 <a:latin typeface="Century Gothic"/>
                 <a:ea typeface="Century Gothic"/>
               </a:rPr>
-              <a:t>~/tw-autotrader</a:t>
+              <a:t/>
             </a:r>
             <a:r>
               <a:rPr lang="zh-TW" sz="1800" b="0" u="none" strike="noStrike">
@@ -24408,7 +24392,7 @@
                 <a:latin typeface="Century Gothic"/>
                 <a:ea typeface="Century Gothic"/>
               </a:rPr>
-              <a:t>目錄下執行</a:t>
+              <a:t/>
             </a:r>
             <a:r>
               <a:rPr lang="en-US" sz="1800" b="0" u="none" strike="noStrike">
@@ -24423,7 +24407,7 @@
                 <a:latin typeface="Century Gothic"/>
                 <a:ea typeface="Century Gothic"/>
               </a:rPr>
-              <a:t>opencode, </a:t>
+              <a:t/>
             </a:r>
             <a:r>
               <a:rPr lang="zh-TW" sz="1800" b="0" u="none" strike="noStrike">
@@ -24438,7 +24422,7 @@
                 <a:latin typeface="Century Gothic"/>
                 <a:ea typeface="Century Gothic"/>
               </a:rPr>
-              <a:t>用</a:t>
+              <a:t/>
             </a:r>
             <a:r>
               <a:rPr lang="en-US" sz="1800" b="0" u="none" strike="noStrike">
@@ -24453,7 +24437,7 @@
                 <a:latin typeface="Century Gothic"/>
                 <a:ea typeface="Century Gothic"/>
               </a:rPr>
-              <a:t>TAB</a:t>
+              <a:t/>
             </a:r>
             <a:r>
               <a:rPr lang="zh-TW" sz="1800" b="0" u="none" strike="noStrike">
@@ -24468,7 +24452,7 @@
                 <a:latin typeface="Century Gothic"/>
                 <a:ea typeface="Century Gothic"/>
               </a:rPr>
-              <a:t>選模式</a:t>
+              <a:t/>
             </a:r>
             <a:r>
               <a:rPr lang="en-US" sz="1800" b="0" u="none" strike="noStrike">
@@ -24483,7 +24467,7 @@
                 <a:latin typeface="Century Gothic"/>
                 <a:ea typeface="Century Gothic"/>
               </a:rPr>
-              <a:t>=&gt;</a:t>
+              <a:t/>
             </a:r>
             <a:r>
               <a:rPr lang="zh-TW" sz="1800" b="0" u="none" strike="noStrike">
@@ -24498,7 +24482,7 @@
                 <a:latin typeface="Century Gothic"/>
                 <a:ea typeface="Century Gothic"/>
               </a:rPr>
-              <a:t>一般用</a:t>
+              <a:t/>
             </a:r>
             <a:r>
               <a:rPr lang="en-US" sz="1800" b="0" u="none" strike="noStrike">
@@ -24513,7 +24497,7 @@
                 <a:latin typeface="Century Gothic"/>
                 <a:ea typeface="Century Gothic"/>
               </a:rPr>
-              <a:t>Sisphus Ultraworker, </a:t>
+              <a:t/>
             </a:r>
             <a:r>
               <a:rPr lang="zh-TW" sz="1800" b="0" u="none" strike="noStrike">
@@ -24528,7 +24512,7 @@
                 <a:latin typeface="Century Gothic"/>
                 <a:ea typeface="Century Gothic"/>
               </a:rPr>
-              <a:t>規劃階段用</a:t>
+              <a:t/>
             </a:r>
             <a:r>
               <a:rPr lang="en-US" sz="1800" b="0" u="none" strike="noStrike">
@@ -24543,7 +24527,7 @@
                 <a:latin typeface="Century Gothic"/>
                 <a:ea typeface="Century Gothic"/>
               </a:rPr>
-              <a:t>Prometheus Plan Builder(</a:t>
+              <a:t/>
             </a:r>
             <a:r>
               <a:rPr lang="zh-TW" sz="1800" b="0" u="none" strike="noStrike">
@@ -24558,7 +24542,7 @@
                 <a:latin typeface="Century Gothic"/>
                 <a:ea typeface="Century Gothic"/>
               </a:rPr>
-              <a:t>先建好</a:t>
+              <a:t/>
             </a:r>
             <a:r>
               <a:rPr lang="en-US" sz="1800" b="0" u="none" strike="noStrike">
@@ -24573,7 +24557,7 @@
                 <a:latin typeface="Century Gothic"/>
                 <a:ea typeface="Century Gothic"/>
               </a:rPr>
-              <a:t>plan </a:t>
+              <a:t/>
             </a:r>
             <a:r>
               <a:rPr lang="zh-TW" sz="1800" b="0" u="none" strike="noStrike">
@@ -24588,7 +24572,7 @@
                 <a:latin typeface="Century Gothic"/>
                 <a:ea typeface="Century Gothic"/>
               </a:rPr>
-              <a:t>後再執行</a:t>
+              <a:t/>
             </a:r>
             <a:r>
               <a:rPr lang="en-US" sz="1800" b="0" u="none" strike="noStrike">
@@ -24603,7 +24587,7 @@
                 <a:latin typeface="Century Gothic"/>
                 <a:ea typeface="Century Gothic"/>
               </a:rPr>
-              <a:t>)</a:t>
+              <a:t/>
             </a:r>
             <a:endParaRPr lang="en-US" sz="1800" b="0" u="none" strike="noStrike">
               <a:solidFill>
@@ -24742,7 +24726,7 @@
                 <a:uFillTx/>
                 <a:latin typeface="Century Gothic"/>
               </a:rPr>
-              <a:t>使用</a:t>
+              <a:t>使用 DSH 的 plan 模式</a:t>
             </a:r>
             <a:r>
               <a:rPr lang="en-US" sz="3200" b="1" u="none" strike="noStrike">
@@ -24756,7 +24740,7 @@
                 <a:uFillTx/>
                 <a:latin typeface="Century Gothic"/>
               </a:rPr>
-              <a:t>Prometheus Plan Builder</a:t>
+              <a:t/>
             </a:r>
             <a:endParaRPr lang="en-US" sz="3200" b="1" u="none" strike="noStrike">
               <a:solidFill>
@@ -24905,7 +24889,7 @@
                 <a:latin typeface="Century Gothic"/>
                 <a:ea typeface="Century Gothic"/>
               </a:rPr>
-              <a:t>輸入</a:t>
+              <a:t>確認計畫後 DSH 就會開始執行；過程中有問題直接在對話追加指示，或切回 plan 模式重新規劃。完成後在介面看得到結果；長時間任務可用 goal 讓它分回合續跑，不用一直盯著螢幕。</a:t>
             </a:r>
             <a:r>
               <a:rPr lang="en-US" sz="1800" b="0" u="none" strike="noStrike">
@@ -24920,7 +24904,7 @@
                 <a:latin typeface="Century Gothic"/>
                 <a:ea typeface="Century Gothic"/>
               </a:rPr>
-              <a:t>/start-work(</a:t>
+              <a:t/>
             </a:r>
             <a:r>
               <a:rPr lang="zh-TW" sz="1800" b="0" u="none" strike="noStrike">
@@ -24935,7 +24919,7 @@
                 <a:latin typeface="Century Gothic"/>
                 <a:ea typeface="Century Gothic"/>
               </a:rPr>
-              <a:t>有問題直接切到</a:t>
+              <a:t/>
             </a:r>
             <a:r>
               <a:rPr lang="en-US" sz="1800" b="0" u="none" strike="noStrike">
@@ -24950,7 +24934,7 @@
                 <a:latin typeface="Century Gothic"/>
                 <a:ea typeface="Century Gothic"/>
               </a:rPr>
-              <a:t>Ultraworker)</a:t>
+              <a:t/>
             </a:r>
             <a:endParaRPr lang="en-US" sz="1800" b="0" u="none" strike="noStrike">
               <a:solidFill>
@@ -25007,7 +24991,7 @@
                 <a:latin typeface="Century Gothic"/>
                 <a:ea typeface="Century Gothic"/>
               </a:rPr>
-              <a:t>opencode</a:t>
+              <a:t>DSH</a:t>
             </a:r>
             <a:r>
               <a:rPr lang="zh-TW" sz="1800" b="0" u="none" strike="noStrike">
@@ -26004,7 +25988,7 @@
                 <a:uFillTx/>
                 <a:latin typeface="Century Gothic"/>
               </a:rPr>
-              <a:t>Opencode</a:t>
+              <a:t>DSH</a:t>
             </a:r>
             <a:r>
               <a:rPr lang="zh-TW" sz="3200" b="1" u="none" strike="noStrike">
@@ -26168,7 +26152,7 @@
                 <a:latin typeface="Century Gothic"/>
                 <a:ea typeface="Century Gothic"/>
               </a:rPr>
-              <a:t>     backtest-data-pitfalls.MD</a:t>
+              <a:t>~/tw-selfselect/cairn/</a:t>
             </a:r>
             <a:r>
               <a:rPr lang="en-US" sz="1800" b="0" u="none" strike="noStrike">
@@ -26183,7 +26167,7 @@
                 <a:latin typeface="Century Gothic"/>
                 <a:ea typeface="Century Gothic"/>
               </a:rPr>
-              <a:t>(</a:t>
+              <a:t/>
             </a:r>
             <a:r>
               <a:rPr lang="zh-TW" sz="1800" b="0" u="none" strike="noStrike">
@@ -26198,7 +26182,7 @@
                 <a:latin typeface="Century Gothic"/>
                 <a:ea typeface="Century Gothic"/>
               </a:rPr>
-              <a:t>於</a:t>
+              <a:t/>
             </a:r>
             <a:r>
               <a:rPr lang="en-US" sz="1800" b="0" u="none" strike="noStrike">
@@ -26213,7 +26197,7 @@
                 <a:latin typeface="Century Gothic"/>
                 <a:ea typeface="Century Gothic"/>
               </a:rPr>
-              <a:t>~/tw-Autotrader/cairn/)=&gt;</a:t>
+              <a:t/>
             </a:r>
             <a:endParaRPr lang="en-US" sz="1800" b="0" u="none" strike="noStrike">
               <a:solidFill>
@@ -28233,7 +28217,7 @@
                 <a:uFillTx/>
                 <a:latin typeface="Century Gothic"/>
               </a:rPr>
-              <a:t>opencode</a:t>
+              <a:t>DSH</a:t>
             </a:r>
             <a:r>
               <a:rPr lang="zh-TW" sz="4800" b="1" u="none" strike="noStrike">
@@ -28449,7 +28433,7 @@
                 <a:uFillTx/>
                 <a:latin typeface="Century Gothic"/>
               </a:rPr>
-              <a:t>關於</a:t>
+              <a:t>關於 DSH</a:t>
             </a:r>
             <a:r>
               <a:rPr lang="en-US" sz="3200" b="1" u="none" strike="noStrike">
@@ -28463,7 +28447,7 @@
                 <a:uFillTx/>
                 <a:latin typeface="Century Gothic"/>
               </a:rPr>
-              <a:t>opencode</a:t>
+              <a:t/>
             </a:r>
             <a:endParaRPr lang="en-US" sz="3200" b="1" u="none" strike="noStrike">
               <a:solidFill>
@@ -28585,466 +28569,17 @@
             <a:normAutofit/>
           </a:bodyPr>
           <a:p>
-            <a:pPr marL="331560" indent="-285840" algn="l" defTabSz="914400">
-              <a:lnSpc>
-                <a:spcPct val="110000"/>
-              </a:lnSpc>
-              <a:spcBef>
-                <a:spcPts val="1800"/>
-              </a:spcBef>
-              <a:buClr>
-                <a:srgbClr val="595959"/>
-              </a:buClr>
-              <a:buSzPct val="80000"/>
-              <a:buFont typeface="Arial"/>
-              <a:buChar char="•"/>
-            </a:pPr>
-            <a:r>
-              <a:rPr lang="zh-TW" sz="1800" b="0" u="none" strike="noStrike">
-                <a:solidFill>
-                  <a:schemeClr val="dk1">
-                    <a:lumMod val="85000"/>
-                    <a:lumOff val="15000"/>
-                  </a:schemeClr>
-                </a:solidFill>
-                <a:effectLst/>
-                <a:uFillTx/>
-                <a:latin typeface="Century Gothic"/>
-                <a:ea typeface="Century Gothic"/>
-              </a:rPr>
-              <a:t>用</a:t>
-            </a:r>
-            <a:r>
-              <a:rPr lang="en-US" sz="1800" b="0" u="none" strike="noStrike">
-                <a:solidFill>
-                  <a:schemeClr val="dk1">
-                    <a:lumMod val="85000"/>
-                    <a:lumOff val="15000"/>
-                  </a:schemeClr>
-                </a:solidFill>
-                <a:effectLst/>
-                <a:uFillTx/>
-                <a:latin typeface="Century Gothic"/>
-                <a:ea typeface="Century Gothic"/>
-              </a:rPr>
-              <a:t>ctrl-P </a:t>
-            </a:r>
-            <a:r>
-              <a:rPr lang="zh-TW" sz="1800" b="0" u="none" strike="noStrike">
-                <a:solidFill>
-                  <a:schemeClr val="dk1">
-                    <a:lumMod val="85000"/>
-                    <a:lumOff val="15000"/>
-                  </a:schemeClr>
-                </a:solidFill>
-                <a:effectLst/>
-                <a:uFillTx/>
-                <a:latin typeface="Century Gothic"/>
-                <a:ea typeface="Century Gothic"/>
-              </a:rPr>
-              <a:t>更換模型</a:t>
-            </a:r>
-            <a:endParaRPr lang="en-US" sz="1800" b="0" u="none" strike="noStrike">
-              <a:solidFill>
-                <a:schemeClr val="dk1">
-                  <a:lumMod val="85000"/>
-                  <a:lumOff val="15000"/>
-                </a:schemeClr>
-              </a:solidFill>
-              <a:effectLst/>
-              <a:uFillTx/>
-              <a:latin typeface="Century Gothic"/>
-            </a:endParaRPr>
-          </a:p>
-          <a:p>
-            <a:pPr marL="331560" indent="-285840" algn="l" defTabSz="914400">
-              <a:lnSpc>
-                <a:spcPct val="110000"/>
-              </a:lnSpc>
-              <a:spcBef>
-                <a:spcPts val="1800"/>
-              </a:spcBef>
-              <a:buClr>
-                <a:srgbClr val="595959"/>
-              </a:buClr>
-              <a:buSzPct val="80000"/>
-              <a:buFont typeface="Arial"/>
-              <a:buChar char="•"/>
-            </a:pPr>
-            <a:r>
-              <a:rPr lang="zh-TW" sz="1800" b="0" u="none" strike="noStrike">
-                <a:solidFill>
-                  <a:schemeClr val="dk1">
-                    <a:lumMod val="85000"/>
-                    <a:lumOff val="15000"/>
-                  </a:schemeClr>
-                </a:solidFill>
-                <a:effectLst/>
-                <a:uFillTx/>
-                <a:latin typeface="Century Gothic"/>
-                <a:ea typeface="Century Gothic"/>
-              </a:rPr>
-              <a:t>選</a:t>
-            </a:r>
-            <a:r>
-              <a:rPr lang="en-US" sz="1800" b="0" u="none" strike="noStrike">
-                <a:solidFill>
-                  <a:schemeClr val="dk1">
-                    <a:lumMod val="85000"/>
-                    <a:lumOff val="15000"/>
-                  </a:schemeClr>
-                </a:solidFill>
-                <a:effectLst/>
-                <a:uFillTx/>
-                <a:latin typeface="Century Gothic"/>
-                <a:ea typeface="Century Gothic"/>
-              </a:rPr>
-              <a:t>Deepseek V4 Flash(</a:t>
-            </a:r>
-            <a:r>
-              <a:rPr lang="zh-TW" sz="1800" b="0" u="none" strike="noStrike">
-                <a:solidFill>
-                  <a:schemeClr val="dk1">
-                    <a:lumMod val="85000"/>
-                    <a:lumOff val="15000"/>
-                  </a:schemeClr>
-                </a:solidFill>
-                <a:effectLst/>
-                <a:uFillTx/>
-                <a:latin typeface="Century Gothic"/>
-                <a:ea typeface="Century Gothic"/>
-              </a:rPr>
-              <a:t>一般</a:t>
-            </a:r>
-            <a:r>
-              <a:rPr lang="en-US" sz="1800" b="0" u="none" strike="noStrike">
-                <a:solidFill>
-                  <a:schemeClr val="dk1">
-                    <a:lumMod val="85000"/>
-                    <a:lumOff val="15000"/>
-                  </a:schemeClr>
-                </a:solidFill>
-                <a:effectLst/>
-                <a:uFillTx/>
-                <a:latin typeface="Century Gothic"/>
-                <a:ea typeface="Century Gothic"/>
-              </a:rPr>
-              <a:t>Flash</a:t>
-            </a:r>
-            <a:r>
-              <a:rPr lang="zh-TW" sz="1800" b="0" u="none" strike="noStrike">
-                <a:solidFill>
-                  <a:schemeClr val="dk1">
-                    <a:lumMod val="85000"/>
-                    <a:lumOff val="15000"/>
-                  </a:schemeClr>
-                </a:solidFill>
-                <a:effectLst/>
-                <a:uFillTx/>
-                <a:latin typeface="Century Gothic"/>
-                <a:ea typeface="Century Gothic"/>
-              </a:rPr>
-              <a:t>就夠</a:t>
-            </a:r>
-            <a:r>
-              <a:rPr lang="en-US" sz="1800" b="0" u="none" strike="noStrike">
-                <a:solidFill>
-                  <a:schemeClr val="dk1">
-                    <a:lumMod val="85000"/>
-                    <a:lumOff val="15000"/>
-                  </a:schemeClr>
-                </a:solidFill>
-                <a:effectLst/>
-                <a:uFillTx/>
-                <a:latin typeface="Century Gothic"/>
-                <a:ea typeface="Century Gothic"/>
-              </a:rPr>
-              <a:t>,</a:t>
-            </a:r>
-            <a:r>
-              <a:rPr lang="zh-TW" sz="1800" b="0" u="none" strike="noStrike">
-                <a:solidFill>
-                  <a:schemeClr val="dk1">
-                    <a:lumMod val="85000"/>
-                    <a:lumOff val="15000"/>
-                  </a:schemeClr>
-                </a:solidFill>
-                <a:effectLst/>
-                <a:uFillTx/>
-                <a:latin typeface="Century Gothic"/>
-                <a:ea typeface="Century Gothic"/>
-              </a:rPr>
-              <a:t>較複雜的問題可以換</a:t>
-            </a:r>
-            <a:r>
-              <a:rPr lang="en-US" sz="1800" b="0" u="none" strike="noStrike">
-                <a:solidFill>
-                  <a:schemeClr val="dk1">
-                    <a:lumMod val="85000"/>
-                    <a:lumOff val="15000"/>
-                  </a:schemeClr>
-                </a:solidFill>
-                <a:effectLst/>
-                <a:uFillTx/>
-                <a:latin typeface="Century Gothic"/>
-                <a:ea typeface="Century Gothic"/>
-              </a:rPr>
-              <a:t>Deepseek V4 RRO.  </a:t>
-            </a:r>
-            <a:r>
-              <a:rPr lang="zh-TW" sz="1800" b="0" u="none" strike="noStrike">
-                <a:solidFill>
-                  <a:srgbClr val="FF0000"/>
-                </a:solidFill>
-                <a:effectLst/>
-                <a:uFillTx/>
-                <a:latin typeface="Century Gothic"/>
-                <a:ea typeface="Century Gothic"/>
-              </a:rPr>
-              <a:t>強烈建議若使用</a:t>
-            </a:r>
-            <a:r>
-              <a:rPr lang="en-US" sz="1800" b="0" u="none" strike="noStrike">
-                <a:solidFill>
-                  <a:srgbClr val="FF0000"/>
-                </a:solidFill>
-                <a:effectLst/>
-                <a:uFillTx/>
-                <a:latin typeface="Century Gothic"/>
-                <a:ea typeface="Century Gothic"/>
-              </a:rPr>
-              <a:t>Deepseek V4 Flash </a:t>
-            </a:r>
-            <a:r>
-              <a:rPr lang="zh-TW" sz="1800" b="0" u="none" strike="noStrike">
-                <a:solidFill>
-                  <a:srgbClr val="FF0000"/>
-                </a:solidFill>
-                <a:effectLst/>
-                <a:uFillTx/>
-                <a:latin typeface="Century Gothic"/>
-                <a:ea typeface="Century Gothic"/>
-              </a:rPr>
-              <a:t>或 </a:t>
-            </a:r>
-            <a:r>
-              <a:rPr lang="en-US" sz="1800" b="0" u="none" strike="noStrike">
-                <a:solidFill>
-                  <a:srgbClr val="FF0000"/>
-                </a:solidFill>
-                <a:effectLst/>
-                <a:uFillTx/>
-                <a:latin typeface="Century Gothic"/>
-                <a:ea typeface="Century Gothic"/>
-              </a:rPr>
-              <a:t>PRO, </a:t>
-            </a:r>
-            <a:r>
-              <a:rPr lang="zh-TW" sz="1800" b="0" u="none" strike="noStrike">
-                <a:solidFill>
-                  <a:srgbClr val="FF0000"/>
-                </a:solidFill>
-                <a:effectLst/>
-                <a:uFillTx/>
-                <a:latin typeface="Century Gothic"/>
-                <a:ea typeface="Century Gothic"/>
-              </a:rPr>
-              <a:t>同一段落不要混用其他廠家</a:t>
-            </a:r>
-            <a:r>
-              <a:rPr lang="en-US" sz="1800" b="0" u="none" strike="noStrike">
-                <a:solidFill>
-                  <a:srgbClr val="FF0000"/>
-                </a:solidFill>
-                <a:effectLst/>
-                <a:uFillTx/>
-                <a:latin typeface="Century Gothic"/>
-                <a:ea typeface="Century Gothic"/>
-              </a:rPr>
-              <a:t>AI </a:t>
-            </a:r>
-            <a:r>
-              <a:rPr lang="zh-TW" sz="1800" b="0" u="none" strike="noStrike">
-                <a:solidFill>
-                  <a:srgbClr val="FF0000"/>
-                </a:solidFill>
-                <a:effectLst/>
-                <a:uFillTx/>
-                <a:latin typeface="Century Gothic"/>
-                <a:ea typeface="Century Gothic"/>
-              </a:rPr>
-              <a:t>模型</a:t>
-            </a:r>
-            <a:r>
-              <a:rPr lang="en-US" sz="1800" b="0" u="none" strike="noStrike">
-                <a:solidFill>
-                  <a:srgbClr val="FF0000"/>
-                </a:solidFill>
-                <a:effectLst/>
-                <a:uFillTx/>
-                <a:latin typeface="Century Gothic"/>
-                <a:ea typeface="Century Gothic"/>
-              </a:rPr>
-              <a:t>!</a:t>
-            </a:r>
-            <a:endParaRPr lang="en-US" sz="1800" b="0" u="none" strike="noStrike">
-              <a:solidFill>
-                <a:schemeClr val="dk1">
-                  <a:lumMod val="85000"/>
-                  <a:lumOff val="15000"/>
-                </a:schemeClr>
-              </a:solidFill>
-              <a:effectLst/>
-              <a:uFillTx/>
-              <a:latin typeface="Century Gothic"/>
-            </a:endParaRPr>
-          </a:p>
-          <a:p>
-            <a:pPr marL="331560" indent="-285840" algn="l" defTabSz="914400">
-              <a:lnSpc>
-                <a:spcPct val="110000"/>
-              </a:lnSpc>
-              <a:spcBef>
-                <a:spcPts val="1800"/>
-              </a:spcBef>
-              <a:buClr>
-                <a:srgbClr val="595959"/>
-              </a:buClr>
-              <a:buSzPct val="80000"/>
-              <a:buFont typeface="Arial"/>
-              <a:buChar char="•"/>
-            </a:pPr>
-            <a:r>
-              <a:rPr lang="zh-TW" sz="1800" b="0" u="none" strike="noStrike">
-                <a:solidFill>
-                  <a:schemeClr val="dk1"/>
-                </a:solidFill>
-                <a:effectLst/>
-                <a:uFillTx/>
-                <a:latin typeface="Century Gothic"/>
-                <a:ea typeface="Century Gothic"/>
-              </a:rPr>
-              <a:t>可以先用</a:t>
-            </a:r>
-            <a:r>
-              <a:rPr lang="en-US" sz="1800" b="0" u="none" strike="noStrike">
-                <a:solidFill>
-                  <a:schemeClr val="dk1"/>
-                </a:solidFill>
-                <a:effectLst/>
-                <a:uFillTx/>
-                <a:latin typeface="Century Gothic"/>
-                <a:ea typeface="Century Gothic"/>
-              </a:rPr>
-              <a:t>Nvidia</a:t>
-            </a:r>
-            <a:r>
-              <a:rPr lang="zh-TW" sz="1800" b="0" u="none" strike="noStrike">
-                <a:solidFill>
-                  <a:schemeClr val="dk1"/>
-                </a:solidFill>
-                <a:effectLst/>
-                <a:uFillTx/>
-                <a:latin typeface="Century Gothic"/>
-                <a:ea typeface="Century Gothic"/>
-              </a:rPr>
-              <a:t>或其他家免費的</a:t>
-            </a:r>
-            <a:r>
-              <a:rPr lang="en-US" sz="1800" b="0" u="none" strike="noStrike">
-                <a:solidFill>
-                  <a:srgbClr val="FF0000"/>
-                </a:solidFill>
-                <a:effectLst/>
-                <a:uFillTx/>
-                <a:latin typeface="Century Gothic"/>
-                <a:ea typeface="Century Gothic"/>
-              </a:rPr>
-              <a:t>Deepseek V4 , </a:t>
-            </a:r>
-            <a:r>
-              <a:rPr lang="zh-TW" sz="1800" b="0" u="none" strike="noStrike">
-                <a:solidFill>
-                  <a:schemeClr val="dk1"/>
-                </a:solidFill>
-                <a:effectLst/>
-                <a:uFillTx/>
-                <a:latin typeface="Century Gothic"/>
-                <a:ea typeface="Century Gothic"/>
-              </a:rPr>
-              <a:t>免費額度用完再使用付費</a:t>
-            </a:r>
-            <a:r>
-              <a:rPr lang="en-US" sz="1800" b="0" u="none" strike="noStrike">
-                <a:solidFill>
-                  <a:schemeClr val="dk1"/>
-                </a:solidFill>
-                <a:effectLst/>
-                <a:uFillTx/>
-                <a:latin typeface="Century Gothic"/>
-                <a:ea typeface="Century Gothic"/>
-              </a:rPr>
-              <a:t>(Openrout</a:t>
-            </a:r>
-            <a:r>
-              <a:rPr lang="zh-CN" sz="1800" b="0" u="none" strike="noStrike">
-                <a:solidFill>
-                  <a:schemeClr val="dk1"/>
-                </a:solidFill>
-                <a:effectLst/>
-                <a:uFillTx/>
-                <a:latin typeface="Century Gothic"/>
-                <a:ea typeface="Century Gothic"/>
-              </a:rPr>
-              <a:t>我们沟通使用繁中</a:t>
-            </a:r>
-            <a:r>
-              <a:rPr lang="en-US" sz="1800" b="0" u="none" strike="noStrike">
-                <a:solidFill>
-                  <a:schemeClr val="dk1"/>
-                </a:solidFill>
-                <a:effectLst/>
-                <a:uFillTx/>
-                <a:latin typeface="Century Gothic"/>
-                <a:ea typeface="Century Gothic"/>
-              </a:rPr>
-              <a:t>er</a:t>
-            </a:r>
-            <a:r>
-              <a:rPr lang="zh-TW" sz="1800" b="0" u="none" strike="noStrike">
-                <a:solidFill>
-                  <a:schemeClr val="dk1"/>
-                </a:solidFill>
-                <a:effectLst/>
-                <a:uFillTx/>
-                <a:latin typeface="Century Gothic"/>
-                <a:ea typeface="Century Gothic"/>
-              </a:rPr>
-              <a:t>的</a:t>
-            </a:r>
-            <a:r>
-              <a:rPr lang="en-US" sz="1800" b="0" u="none" strike="noStrike">
-                <a:solidFill>
-                  <a:schemeClr val="dk1"/>
-                </a:solidFill>
-                <a:effectLst/>
-                <a:uFillTx/>
-                <a:latin typeface="Century Gothic"/>
-                <a:ea typeface="Century Gothic"/>
-              </a:rPr>
-              <a:t>) Deepseek V4 </a:t>
-            </a:r>
-            <a:endParaRPr lang="en-US" sz="1800" b="0" u="none" strike="noStrike">
-              <a:solidFill>
-                <a:schemeClr val="dk1">
-                  <a:lumMod val="85000"/>
-                  <a:lumOff val="15000"/>
-                </a:schemeClr>
-              </a:solidFill>
-              <a:effectLst/>
-              <a:uFillTx/>
-              <a:latin typeface="Century Gothic"/>
-            </a:endParaRPr>
+            <a:r>
+              <a:t>切換模型：DSH Web 介面</a:t>
+            </a:r>
+            <a:br/>
+            <a:r>
+              <a:t>本課程統一用 deepseek-flash</a:t>
+            </a:r>
+            <a:br/>
+            <a:r>
+              <a:t>（同一段對話不要混用其他廠牌模型）</a:t>
+            </a:r>
           </a:p>
         </p:txBody>
       </p:sp>
@@ -29172,7 +28707,7 @@
                 <a:uFillTx/>
                 <a:latin typeface="Century Gothic"/>
               </a:rPr>
-              <a:t>關於</a:t>
+              <a:t>關於 DSH</a:t>
             </a:r>
             <a:r>
               <a:rPr lang="en-US" sz="3200" b="1" u="none" strike="noStrike">
@@ -29186,7 +28721,7 @@
                 <a:uFillTx/>
                 <a:latin typeface="Century Gothic"/>
               </a:rPr>
-              <a:t>opencode</a:t>
+              <a:t/>
             </a:r>
             <a:endParaRPr lang="en-US" sz="3200" b="1" u="none" strike="noStrike">
               <a:solidFill>
@@ -29497,7 +29032,7 @@
                 <a:latin typeface="Century Gothic"/>
                 <a:ea typeface="Century Gothic"/>
               </a:rPr>
-              <a:t>輸入</a:t>
+              <a:t>關閉瀏覽器分頁即結束（背景伺服器用 Ctrl+C 停）</a:t>
             </a:r>
             <a:r>
               <a:rPr lang="en-US" sz="1800" b="0" u="none" strike="noStrike">
@@ -29512,7 +29047,7 @@
                 <a:latin typeface="Century Gothic"/>
                 <a:ea typeface="Century Gothic"/>
               </a:rPr>
-              <a:t>/exit</a:t>
+              <a:t/>
             </a:r>
             <a:r>
               <a:rPr lang="zh-TW" sz="1800" b="0" u="none" strike="noStrike">
@@ -29527,7 +29062,7 @@
                 <a:latin typeface="Century Gothic"/>
                 <a:ea typeface="Century Gothic"/>
               </a:rPr>
-              <a:t>離開</a:t>
+              <a:t/>
             </a:r>
             <a:endParaRPr lang="en-US" sz="1800" b="0" u="none" strike="noStrike">
               <a:solidFill>
@@ -29569,7 +29104,7 @@
                 <a:latin typeface="Century Gothic"/>
                 <a:ea typeface="Century Gothic"/>
               </a:rPr>
-              <a:t>/init</a:t>
+              <a:t>工作目錄＝啟動 DSH 的專案根（本專案 ~/tw-selfselect），不需要額外初始化</a:t>
             </a:r>
             <a:r>
               <a:rPr lang="zh-TW" sz="1800" b="0" u="none" strike="noStrike">
@@ -29584,7 +29119,7 @@
                 <a:latin typeface="Century Gothic"/>
                 <a:ea typeface="Century Gothic"/>
               </a:rPr>
-              <a:t>起始工作目錄</a:t>
+              <a:t/>
             </a:r>
             <a:r>
               <a:rPr lang="en-US" sz="1800" b="0" u="none" strike="noStrike">
@@ -29599,7 +29134,7 @@
                 <a:latin typeface="Century Gothic"/>
                 <a:ea typeface="Century Gothic"/>
               </a:rPr>
-              <a:t>(tw-autotrader</a:t>
+              <a:t/>
             </a:r>
             <a:r>
               <a:rPr lang="zh-TW" sz="1800" b="0" u="none" strike="noStrike">
@@ -29614,7 +29149,7 @@
                 <a:latin typeface="Century Gothic"/>
                 <a:ea typeface="Century Gothic"/>
               </a:rPr>
-              <a:t>已經</a:t>
+              <a:t/>
             </a:r>
             <a:r>
               <a:rPr lang="en-US" sz="1800" b="0" u="none" strike="noStrike">
@@ -29629,7 +29164,7 @@
                 <a:latin typeface="Century Gothic"/>
                 <a:ea typeface="Century Gothic"/>
               </a:rPr>
-              <a:t>init</a:t>
+              <a:t/>
             </a:r>
             <a:r>
               <a:rPr lang="zh-TW" sz="1800" b="0" u="none" strike="noStrike">
@@ -29644,7 +29179,7 @@
                 <a:latin typeface="Century Gothic"/>
                 <a:ea typeface="Century Gothic"/>
               </a:rPr>
-              <a:t>過</a:t>
+              <a:t/>
             </a:r>
             <a:r>
               <a:rPr lang="en-US" sz="1800" b="0" u="none" strike="noStrike">
@@ -29659,7 +29194,7 @@
                 <a:latin typeface="Century Gothic"/>
                 <a:ea typeface="Century Gothic"/>
               </a:rPr>
-              <a:t>)</a:t>
+              <a:t/>
             </a:r>
             <a:endParaRPr lang="en-US" sz="1800" b="0" u="none" strike="noStrike">
               <a:solidFill>
@@ -29701,7 +29236,7 @@
                 <a:latin typeface="Century Gothic"/>
                 <a:ea typeface="Century Gothic"/>
               </a:rPr>
-              <a:t>/Finmind </a:t>
+              <a:t>技能（skills）：直接用自然語言描述，例如「用 finmind 抓台積電月營收」，DSH 會呼叫對應技能</a:t>
             </a:r>
             <a:r>
               <a:rPr lang="zh-TW" sz="1800" b="0" u="none" strike="noStrike">
@@ -29716,7 +29251,7 @@
                 <a:latin typeface="Century Gothic"/>
                 <a:ea typeface="Century Gothic"/>
               </a:rPr>
-              <a:t>呼叫</a:t>
+              <a:t/>
             </a:r>
             <a:r>
               <a:rPr lang="en-US" sz="1800" b="0" u="none" strike="noStrike">
@@ -29731,7 +29266,7 @@
                 <a:latin typeface="Century Gothic"/>
                 <a:ea typeface="Century Gothic"/>
               </a:rPr>
-              <a:t>Finmind</a:t>
+              <a:t/>
             </a:r>
             <a:r>
               <a:rPr lang="zh-TW" sz="1800" b="0" u="none" strike="noStrike">
@@ -29746,7 +29281,7 @@
                 <a:latin typeface="Century Gothic"/>
                 <a:ea typeface="Century Gothic"/>
               </a:rPr>
-              <a:t>技能</a:t>
+              <a:t/>
             </a:r>
             <a:endParaRPr lang="en-US" sz="1800" b="0" u="none" strike="noStrike">
               <a:solidFill>
@@ -29788,7 +29323,7 @@
                 <a:latin typeface="Century Gothic"/>
                 <a:ea typeface="Century Gothic"/>
               </a:rPr>
-              <a:t>opencode -s ses_094770cb3ffetdVLq0lKxRcAwJ(</a:t>
+              <a:t>在 Web 介面左側的 session 清單可以直接接續先前的對話</a:t>
             </a:r>
             <a:r>
               <a:rPr lang="zh-TW" sz="1800" b="0" u="none" strike="noStrike">
@@ -29803,7 +29338,7 @@
                 <a:latin typeface="Century Gothic"/>
                 <a:ea typeface="Century Gothic"/>
               </a:rPr>
-              <a:t>回到某個段落</a:t>
+              <a:t/>
             </a:r>
             <a:r>
               <a:rPr lang="en-US" sz="1800" b="0" u="none" strike="noStrike">
@@ -29818,7 +29353,7 @@
                 <a:latin typeface="Century Gothic"/>
                 <a:ea typeface="Century Gothic"/>
               </a:rPr>
-              <a:t>)</a:t>
+              <a:t/>
             </a:r>
             <a:endParaRPr lang="en-US" sz="1800" b="0" u="none" strike="noStrike">
               <a:solidFill>
@@ -29860,7 +29395,7 @@
                 <a:latin typeface="Century Gothic"/>
                 <a:ea typeface="Century Gothic"/>
               </a:rPr>
-              <a:t>wsl</a:t>
+              <a:t>WSL 中執行 dsh_web 會開啟 Web 介面（http://127.0.0.1:3080）</a:t>
             </a:r>
             <a:r>
               <a:rPr lang="zh-TW" sz="1800" b="0" u="none" strike="noStrike">
@@ -29875,7 +29410,7 @@
                 <a:latin typeface="Century Gothic"/>
                 <a:ea typeface="Century Gothic"/>
               </a:rPr>
-              <a:t>中打</a:t>
+              <a:t/>
             </a:r>
             <a:r>
               <a:rPr lang="en-US" sz="1800" b="0" u="none" strike="noStrike">
@@ -29890,7 +29425,7 @@
                 <a:latin typeface="Century Gothic"/>
                 <a:ea typeface="Century Gothic"/>
               </a:rPr>
-              <a:t>opencode_web</a:t>
+              <a:t/>
             </a:r>
             <a:r>
               <a:rPr lang="zh-TW" sz="1800" b="0" u="none" strike="noStrike">
@@ -29905,7 +29440,7 @@
                 <a:latin typeface="Century Gothic"/>
                 <a:ea typeface="Century Gothic"/>
               </a:rPr>
-              <a:t>可以打開視窗版</a:t>
+              <a:t/>
             </a:r>
             <a:r>
               <a:rPr lang="en-US" sz="1800" b="0" u="none" strike="noStrike">
@@ -29920,7 +29455,7 @@
                 <a:latin typeface="Century Gothic"/>
                 <a:ea typeface="Century Gothic"/>
               </a:rPr>
-              <a:t>opencode</a:t>
+              <a:t/>
             </a:r>
             <a:endParaRPr lang="en-US" sz="1800" b="0" u="none" strike="noStrike">
               <a:solidFill>
@@ -30208,226 +29743,17 @@
             <a:noAutofit/>
           </a:bodyPr>
           <a:p>
-            <a:pPr marL="274320" indent="-228600" algn="l" defTabSz="914400">
-              <a:lnSpc>
-                <a:spcPct val="110000"/>
-              </a:lnSpc>
-              <a:spcBef>
-                <a:spcPts val="1800"/>
-              </a:spcBef>
-              <a:buClr>
-                <a:srgbClr val="595959"/>
-              </a:buClr>
-              <a:buSzPct val="80000"/>
-              <a:buFont typeface="Arial"/>
-              <a:buChar char="•"/>
-            </a:pPr>
-            <a:r>
-              <a:rPr lang="zh-TW" sz="1800" b="0" u="none" strike="noStrike">
-                <a:solidFill>
-                  <a:schemeClr val="dk1">
-                    <a:lumMod val="85000"/>
-                    <a:lumOff val="15000"/>
-                  </a:schemeClr>
-                </a:solidFill>
-                <a:effectLst/>
-                <a:uFillTx/>
-                <a:latin typeface="Century Gothic"/>
-                <a:ea typeface="Century Gothic"/>
-              </a:rPr>
-              <a:t>選</a:t>
-            </a:r>
-            <a:r>
-              <a:rPr lang="en-US" sz="1800" b="0" u="none" strike="noStrike">
-                <a:solidFill>
-                  <a:schemeClr val="dk1">
-                    <a:lumMod val="85000"/>
-                    <a:lumOff val="15000"/>
-                  </a:schemeClr>
-                </a:solidFill>
-                <a:effectLst/>
-                <a:uFillTx/>
-                <a:latin typeface="Century Gothic"/>
-                <a:ea typeface="Century Gothic"/>
-              </a:rPr>
-              <a:t>~/tw-Autotrader/</a:t>
-            </a:r>
-            <a:r>
-              <a:rPr lang="zh-TW" sz="1800" b="0" u="none" strike="noStrike">
-                <a:solidFill>
-                  <a:schemeClr val="dk1">
-                    <a:lumMod val="85000"/>
-                    <a:lumOff val="15000"/>
-                  </a:schemeClr>
-                </a:solidFill>
-                <a:effectLst/>
-                <a:uFillTx/>
-                <a:latin typeface="Century Gothic"/>
-                <a:ea typeface="Century Gothic"/>
-              </a:rPr>
-              <a:t>目錄</a:t>
-            </a:r>
-            <a:endParaRPr lang="en-US" sz="1800" b="0" u="none" strike="noStrike">
-              <a:solidFill>
-                <a:schemeClr val="dk1">
-                  <a:lumMod val="85000"/>
-                  <a:lumOff val="15000"/>
-                </a:schemeClr>
-              </a:solidFill>
-              <a:effectLst/>
-              <a:uFillTx/>
-              <a:latin typeface="Century Gothic"/>
-            </a:endParaRPr>
-          </a:p>
-          <a:p>
-            <a:pPr marL="274320" indent="-228600" algn="l" defTabSz="914400">
-              <a:lnSpc>
-                <a:spcPct val="110000"/>
-              </a:lnSpc>
-              <a:spcBef>
-                <a:spcPts val="1800"/>
-              </a:spcBef>
-              <a:buClr>
-                <a:srgbClr val="595959"/>
-              </a:buClr>
-              <a:buSzPct val="80000"/>
-              <a:buFont typeface="Arial"/>
-              <a:buChar char="•"/>
-            </a:pPr>
-            <a:r>
-              <a:rPr lang="zh-TW" sz="1800" b="0" u="none" strike="noStrike">
-                <a:solidFill>
-                  <a:schemeClr val="dk1">
-                    <a:lumMod val="85000"/>
-                    <a:lumOff val="15000"/>
-                  </a:schemeClr>
-                </a:solidFill>
-                <a:effectLst/>
-                <a:uFillTx/>
-                <a:latin typeface="Century Gothic"/>
-                <a:ea typeface="Century Gothic"/>
-              </a:rPr>
-              <a:t>選定</a:t>
-            </a:r>
-            <a:r>
-              <a:rPr lang="en-US" sz="1800" b="0" u="none" strike="noStrike">
-                <a:solidFill>
-                  <a:schemeClr val="dk1">
-                    <a:lumMod val="85000"/>
-                    <a:lumOff val="15000"/>
-                  </a:schemeClr>
-                </a:solidFill>
-                <a:effectLst/>
-                <a:highlight>
-                  <a:srgbClr val="FFFF00"/>
-                </a:highlight>
-                <a:uFillTx/>
-                <a:latin typeface="Century Gothic"/>
-                <a:ea typeface="Century Gothic"/>
-              </a:rPr>
-              <a:t>Ultraworker</a:t>
-            </a:r>
-            <a:r>
-              <a:rPr lang="zh-TW" sz="1800" b="0" u="none" strike="noStrike">
-                <a:solidFill>
-                  <a:schemeClr val="dk1">
-                    <a:lumMod val="85000"/>
-                    <a:lumOff val="15000"/>
-                  </a:schemeClr>
-                </a:solidFill>
-                <a:effectLst/>
-                <a:uFillTx/>
-                <a:latin typeface="Century Gothic"/>
-                <a:ea typeface="Century Gothic"/>
-              </a:rPr>
-              <a:t>模式</a:t>
-            </a:r>
-            <a:endParaRPr lang="en-US" sz="1800" b="0" u="none" strike="noStrike">
-              <a:solidFill>
-                <a:schemeClr val="dk1">
-                  <a:lumMod val="85000"/>
-                  <a:lumOff val="15000"/>
-                </a:schemeClr>
-              </a:solidFill>
-              <a:effectLst/>
-              <a:uFillTx/>
-              <a:latin typeface="Century Gothic"/>
-            </a:endParaRPr>
-          </a:p>
-          <a:p>
-            <a:pPr marL="274320" indent="-228600" algn="l" defTabSz="914400">
-              <a:lnSpc>
-                <a:spcPct val="110000"/>
-              </a:lnSpc>
-              <a:spcBef>
-                <a:spcPts val="1800"/>
-              </a:spcBef>
-              <a:buClr>
-                <a:srgbClr val="595959"/>
-              </a:buClr>
-              <a:buSzPct val="80000"/>
-              <a:buFont typeface="Arial"/>
-              <a:buChar char="•"/>
-            </a:pPr>
-            <a:r>
-              <a:rPr lang="zh-TW" sz="1800" b="0" u="none" strike="noStrike">
-                <a:solidFill>
-                  <a:schemeClr val="dk1">
-                    <a:lumMod val="85000"/>
-                    <a:lumOff val="15000"/>
-                  </a:schemeClr>
-                </a:solidFill>
-                <a:effectLst/>
-                <a:uFillTx/>
-                <a:latin typeface="Century Gothic"/>
-                <a:ea typeface="Century Gothic"/>
-              </a:rPr>
-              <a:t>選定</a:t>
-            </a:r>
-            <a:r>
-              <a:rPr lang="en-US" sz="1800" b="0" u="none" strike="noStrike">
-                <a:solidFill>
-                  <a:schemeClr val="dk1">
-                    <a:lumMod val="85000"/>
-                    <a:lumOff val="15000"/>
-                  </a:schemeClr>
-                </a:solidFill>
-                <a:effectLst/>
-                <a:highlight>
-                  <a:srgbClr val="FFFF00"/>
-                </a:highlight>
-                <a:uFillTx/>
-                <a:latin typeface="Century Gothic"/>
-                <a:ea typeface="Century Gothic"/>
-              </a:rPr>
-              <a:t>Deekseek V4 Flash</a:t>
-            </a:r>
-            <a:r>
-              <a:rPr lang="zh-TW" sz="1800" b="0" u="none" strike="noStrike">
-                <a:solidFill>
-                  <a:schemeClr val="dk1">
-                    <a:lumMod val="85000"/>
-                    <a:lumOff val="15000"/>
-                  </a:schemeClr>
-                </a:solidFill>
-                <a:effectLst/>
-                <a:uFillTx/>
-                <a:latin typeface="Century Gothic"/>
-                <a:ea typeface="Century Gothic"/>
-              </a:rPr>
-              <a:t>模型</a:t>
-            </a:r>
-            <a:endParaRPr lang="en-US" sz="1800" b="0" u="none" strike="noStrike">
-              <a:solidFill>
-                <a:schemeClr val="dk1">
-                  <a:lumMod val="85000"/>
-                  <a:lumOff val="15000"/>
-                </a:schemeClr>
-              </a:solidFill>
-              <a:effectLst/>
-              <a:uFillTx/>
-              <a:latin typeface="Century Gothic"/>
-            </a:endParaRPr>
+            <a:r>
+              <a:t>開啟專案目錄 ~/tw-selfselect</a:t>
+            </a:r>
+            <a:br/>
+            <a:r>
+              <a:t>一般對話模式</a:t>
+            </a:r>
+            <a:br/>
+            <a:r>
+              <a:t>模型選 deepseek-flash</a:t>
+            </a:r>
           </a:p>
         </p:txBody>
       </p:sp>
@@ -30633,7 +29959,7 @@
                 <a:uFillTx/>
                 <a:latin typeface="Century Gothic"/>
               </a:rPr>
-              <a:t>opencode</a:t>
+              <a:t>DSH</a:t>
             </a:r>
             <a:r>
               <a:rPr lang="zh-TW" sz="3200" b="0" u="none" strike="noStrike">
@@ -30667,7 +29993,7 @@
                 <a:uFillTx/>
                 <a:latin typeface="Century Gothic"/>
               </a:rPr>
-              <a:t>wsl~/tw-autotrader/</a:t>
+              <a:t>wsl~/tw-selfselect/</a:t>
             </a:r>
             <a:r>
               <a:rPr lang="zh-TW" sz="3200" b="0" u="none" strike="noStrike">
@@ -32005,7 +31331,7 @@
                 <a:latin typeface="Century Gothic"/>
                 <a:ea typeface="Century Gothic"/>
               </a:rPr>
-              <a:t>~/tw-autotrader/img/mtk_kline_2026_h1.html</a:t>
+              <a:t>~/tw-selfselect/img/mtk_kline_2026_h1.html</a:t>
             </a:r>
             <a:r>
               <a:rPr lang="zh-TW" sz="1700" b="0" u="none" strike="noStrike">

--- a/plans/ppt/TW-SELFSELECT台股買賣自動化系統-W3-講稿版.pptx
+++ b/plans/ppt/TW-SELFSELECT台股買賣自動化系統-W3-講稿版.pptx
@@ -1540,7 +1540,7 @@
           </a:p>
           <a:p>
             <a:r>
-              <a:t>當你的任務比較複雜時，可以用這個模式。你提出需求，Plan Builder 會先制訂一份工作計畫，放在 .omo/plans 底下的 Markdown 檔案——先規劃，再執行。</a:t>
+              <a:t>當你的任務比較複雜時，可以用這個模式。你提出需求，DSH 的 plan 模式會先寫一份工作計畫（Markdown）給你看——先規劃，再執行。</a:t>
             </a:r>
           </a:p>
           <a:p>
@@ -1740,7 +1740,7 @@
           <a:p/>
           <a:p>
             <a:r>
-              <a:t>【講師提示】現場示範一次 Plan Builder 建計畫 + start-work 流程，讓學員看到「計畫→執行→完成提示」的完整循環。</a:t>
+              <a:t>【講師提示】現場示範一次 plan 模式建計畫＋核准後執行的流程，讓學員看到「計畫→執行→完成提示」的完整循環。</a:t>
             </a:r>
           </a:p>
         </p:txBody>
@@ -23740,94 +23740,7 @@
               <a:buChar char="•"/>
             </a:pPr>
             <a:r>
-              <a:rPr lang="en-US" sz="1800" b="0" u="none" strike="noStrike">
-                <a:solidFill>
-                  <a:schemeClr val="dk1">
-                    <a:lumMod val="85000"/>
-                    <a:lumOff val="15000"/>
-                  </a:schemeClr>
-                </a:solidFill>
-                <a:effectLst/>
-                <a:uFillTx/>
-                <a:latin typeface="Century Gothic"/>
-                <a:ea typeface="Century Gothic"/>
-              </a:rPr>
-              <a:t>Plan Builder </a:t>
-            </a:r>
-            <a:r>
-              <a:rPr lang="zh-TW" sz="1800" b="0" u="none" strike="noStrike">
-                <a:solidFill>
-                  <a:schemeClr val="dk1">
-                    <a:lumMod val="85000"/>
-                    <a:lumOff val="15000"/>
-                  </a:schemeClr>
-                </a:solidFill>
-                <a:effectLst/>
-                <a:uFillTx/>
-                <a:latin typeface="Century Gothic"/>
-                <a:ea typeface="Century Gothic"/>
-              </a:rPr>
-              <a:t>會制訂一個放在</a:t>
-            </a:r>
-            <a:r>
-              <a:rPr lang="en-US" sz="1800" b="0" u="none" strike="noStrike">
-                <a:solidFill>
-                  <a:schemeClr val="dk1">
-                    <a:lumMod val="85000"/>
-                    <a:lumOff val="15000"/>
-                  </a:schemeClr>
-                </a:solidFill>
-                <a:effectLst/>
-                <a:uFillTx/>
-                <a:latin typeface="Century Gothic"/>
-                <a:ea typeface="Century Gothic"/>
-              </a:rPr>
-              <a:t>.omo/plans</a:t>
-            </a:r>
-            <a:r>
-              <a:rPr lang="zh-TW" sz="1800" b="0" u="none" strike="noStrike">
-                <a:solidFill>
-                  <a:schemeClr val="dk1">
-                    <a:lumMod val="85000"/>
-                    <a:lumOff val="15000"/>
-                  </a:schemeClr>
-                </a:solidFill>
-                <a:effectLst/>
-                <a:uFillTx/>
-                <a:latin typeface="Century Gothic"/>
-                <a:ea typeface="Century Gothic"/>
-              </a:rPr>
-              <a:t>下的工作</a:t>
-            </a:r>
-            <a:r>
-              <a:rPr lang="en-US" sz="1800" b="0" u="none" strike="noStrike">
-                <a:solidFill>
-                  <a:schemeClr val="dk1">
-                    <a:lumMod val="85000"/>
-                    <a:lumOff val="15000"/>
-                  </a:schemeClr>
-                </a:solidFill>
-                <a:effectLst/>
-                <a:uFillTx/>
-                <a:latin typeface="Century Gothic"/>
-                <a:ea typeface="Century Gothic"/>
-              </a:rPr>
-              <a:t>MD</a:t>
-            </a:r>
-            <a:r>
-              <a:rPr lang="zh-TW" sz="1800" b="0" u="none" strike="noStrike">
-                <a:solidFill>
-                  <a:schemeClr val="dk1">
-                    <a:lumMod val="85000"/>
-                    <a:lumOff val="15000"/>
-                  </a:schemeClr>
-                </a:solidFill>
-                <a:effectLst/>
-                <a:uFillTx/>
-                <a:latin typeface="Century Gothic"/>
-                <a:ea typeface="Century Gothic"/>
-              </a:rPr>
-              <a:t>檔</a:t>
+              <a:t>DSH 的 plan 模式會先寫一份計畫（Markdown）給你看，確認後才執行</a:t>
             </a:r>
             <a:endParaRPr lang="en-US" sz="1800" b="0" u="none" strike="noStrike">
               <a:solidFill>
@@ -23865,16 +23778,12 @@
           </a:p>
         </p:txBody>
       </p:sp>
-      <p:pic>
-        <p:nvPicPr>
-          <p:cNvPr id="165" name="內容版面配置區 6"/>
-          <p:cNvPicPr/>
+      <p:sp>
+        <p:nvSpPr>
+          <p:cNvPr id="165" name="TextBox 164"/>
+          <p:cNvSpPr txBox="1"/>
           <p:nvPr/>
-        </p:nvPicPr>
-        <p:blipFill>
-          <a:blip r:embed="rId1"/>
-          <a:stretch/>
-        </p:blipFill>
+        </p:nvSpPr>
         <p:spPr>
           <a:xfrm>
             <a:off x="3960720" y="1081440"/>
@@ -23884,11 +23793,25 @@
             <a:avLst/>
           </a:prstGeom>
           <a:noFill/>
-          <a:ln w="0">
-            <a:noFill/>
-          </a:ln>
         </p:spPr>
-      </p:pic>
+        <p:txBody>
+          <a:bodyPr wrap="square" anchor="ctr">
+            <a:spAutoFit/>
+          </a:bodyPr>
+          <a:lstStyle/>
+          <a:p>
+            <a:pPr algn="ctr"/>
+            <a:r>
+              <a:rPr sz="1400" i="1">
+                <a:solidFill>
+                  <a:srgbClr val="999999"/>
+                </a:solidFill>
+              </a:rPr>
+              <a:t>（DSH 介面截圖待補）</a:t>
+            </a:r>
+          </a:p>
+        </p:txBody>
+      </p:sp>
     </p:spTree>
   </p:cSld>
   <mc:AlternateContent>
@@ -24320,7 +24243,7 @@
                 <a:latin typeface="Century Gothic"/>
                 <a:ea typeface="Century Gothic"/>
               </a:rPr>
-              <a:t>activate_venv</a:t>
+              <a:t>WSL 中先執行 activate_venv</a:t>
             </a:r>
             <a:endParaRPr lang="en-US" sz="1800" b="0" u="none" strike="noStrike">
               <a:solidFill>
@@ -24625,17 +24548,12 @@
           </a:p>
         </p:txBody>
       </p:sp>
-      <p:pic>
-        <p:nvPicPr>
-          <p:cNvPr id="105" name="圖片 4"/>
-          <p:cNvPicPr/>
+      <p:sp>
+        <p:nvSpPr>
+          <p:cNvPr id="105" name="TextBox 104"/>
+          <p:cNvSpPr txBox="1"/>
           <p:nvPr/>
-        </p:nvPicPr>
-        <p:blipFill>
-          <a:blip r:embed="rId1"/>
-          <a:srcRect l="17878" t="0" r="26669" b="0"/>
-          <a:stretch/>
-        </p:blipFill>
+        </p:nvSpPr>
         <p:spPr>
           <a:xfrm>
             <a:off x="6094440" y="2286000"/>
@@ -24645,11 +24563,25 @@
             <a:avLst/>
           </a:prstGeom>
           <a:noFill/>
-          <a:ln w="0">
-            <a:noFill/>
-          </a:ln>
         </p:spPr>
-      </p:pic>
+        <p:txBody>
+          <a:bodyPr wrap="square" anchor="ctr">
+            <a:spAutoFit/>
+          </a:bodyPr>
+          <a:lstStyle/>
+          <a:p>
+            <a:pPr algn="ctr"/>
+            <a:r>
+              <a:rPr sz="1400" i="1">
+                <a:solidFill>
+                  <a:srgbClr val="999999"/>
+                </a:solidFill>
+              </a:rPr>
+              <a:t>（DSH 介面截圖待補）</a:t>
+            </a:r>
+          </a:p>
+        </p:txBody>
+      </p:sp>
     </p:spTree>
   </p:cSld>
   <mc:AlternateContent>
@@ -25022,16 +24954,12 @@
           </a:p>
         </p:txBody>
       </p:sp>
-      <p:pic>
-        <p:nvPicPr>
-          <p:cNvPr id="169" name="內容版面配置區 7"/>
-          <p:cNvPicPr/>
+      <p:sp>
+        <p:nvSpPr>
+          <p:cNvPr id="171" name="TextBox 170"/>
+          <p:cNvSpPr txBox="1"/>
           <p:nvPr/>
-        </p:nvPicPr>
-        <p:blipFill>
-          <a:blip r:embed="rId1"/>
-          <a:stretch/>
-        </p:blipFill>
+        </p:nvSpPr>
         <p:spPr>
           <a:xfrm>
             <a:off x="5103720" y="1021680"/>
@@ -25041,21 +24969,31 @@
             <a:avLst/>
           </a:prstGeom>
           <a:noFill/>
-          <a:ln w="0">
-            <a:noFill/>
-          </a:ln>
         </p:spPr>
-      </p:pic>
-      <p:pic>
-        <p:nvPicPr>
-          <p:cNvPr id="170" name="圖片 9"/>
-          <p:cNvPicPr/>
+        <p:txBody>
+          <a:bodyPr wrap="square" anchor="ctr">
+            <a:spAutoFit/>
+          </a:bodyPr>
+          <a:lstStyle/>
+          <a:p>
+            <a:pPr algn="ctr"/>
+            <a:r>
+              <a:rPr sz="1400" i="1">
+                <a:solidFill>
+                  <a:srgbClr val="999999"/>
+                </a:solidFill>
+              </a:rPr>
+              <a:t>（DSH 介面截圖待補）</a:t>
+            </a:r>
+          </a:p>
+        </p:txBody>
+      </p:sp>
+      <p:sp>
+        <p:nvSpPr>
+          <p:cNvPr id="172" name="TextBox 171"/>
+          <p:cNvSpPr txBox="1"/>
           <p:nvPr/>
-        </p:nvPicPr>
-        <p:blipFill>
-          <a:blip r:embed="rId2"/>
-          <a:stretch/>
-        </p:blipFill>
+        </p:nvSpPr>
         <p:spPr>
           <a:xfrm>
             <a:off x="591120" y="2309040"/>
@@ -25065,11 +25003,25 @@
             <a:avLst/>
           </a:prstGeom>
           <a:noFill/>
-          <a:ln w="0">
-            <a:noFill/>
-          </a:ln>
         </p:spPr>
-      </p:pic>
+        <p:txBody>
+          <a:bodyPr wrap="square" anchor="ctr">
+            <a:spAutoFit/>
+          </a:bodyPr>
+          <a:lstStyle/>
+          <a:p>
+            <a:pPr algn="ctr"/>
+            <a:r>
+              <a:rPr sz="1400" i="1">
+                <a:solidFill>
+                  <a:srgbClr val="999999"/>
+                </a:solidFill>
+              </a:rPr>
+              <a:t>（DSH 介面截圖待補）</a:t>
+            </a:r>
+          </a:p>
+        </p:txBody>
+      </p:sp>
     </p:spTree>
   </p:cSld>
   <mc:AlternateContent>
@@ -28583,16 +28535,12 @@
           </a:p>
         </p:txBody>
       </p:sp>
-      <p:pic>
-        <p:nvPicPr>
-          <p:cNvPr id="109" name="圖片 5"/>
-          <p:cNvPicPr/>
+      <p:sp>
+        <p:nvSpPr>
+          <p:cNvPr id="111" name="TextBox 110"/>
+          <p:cNvSpPr txBox="1"/>
           <p:nvPr/>
-        </p:nvPicPr>
-        <p:blipFill>
-          <a:blip r:embed="rId1"/>
-          <a:stretch/>
-        </p:blipFill>
+        </p:nvSpPr>
         <p:spPr>
           <a:xfrm>
             <a:off x="6178680" y="1676520"/>
@@ -28602,21 +28550,31 @@
             <a:avLst/>
           </a:prstGeom>
           <a:noFill/>
-          <a:ln w="0">
-            <a:noFill/>
-          </a:ln>
         </p:spPr>
-      </p:pic>
-      <p:pic>
-        <p:nvPicPr>
-          <p:cNvPr id="110" name="圖片 7"/>
-          <p:cNvPicPr/>
+        <p:txBody>
+          <a:bodyPr wrap="square" anchor="ctr">
+            <a:spAutoFit/>
+          </a:bodyPr>
+          <a:lstStyle/>
+          <a:p>
+            <a:pPr algn="ctr"/>
+            <a:r>
+              <a:rPr sz="1400" i="1">
+                <a:solidFill>
+                  <a:srgbClr val="999999"/>
+                </a:solidFill>
+              </a:rPr>
+              <a:t>（DSH 介面截圖待補）</a:t>
+            </a:r>
+          </a:p>
+        </p:txBody>
+      </p:sp>
+      <p:sp>
+        <p:nvSpPr>
+          <p:cNvPr id="112" name="TextBox 111"/>
+          <p:cNvSpPr txBox="1"/>
           <p:nvPr/>
-        </p:nvPicPr>
-        <p:blipFill>
-          <a:blip r:embed="rId2"/>
-          <a:stretch/>
-        </p:blipFill>
+        </p:nvSpPr>
         <p:spPr>
           <a:xfrm>
             <a:off x="6157440" y="4035240"/>
@@ -28626,11 +28584,25 @@
             <a:avLst/>
           </a:prstGeom>
           <a:noFill/>
-          <a:ln w="0">
-            <a:noFill/>
-          </a:ln>
         </p:spPr>
-      </p:pic>
+        <p:txBody>
+          <a:bodyPr wrap="square" anchor="ctr">
+            <a:spAutoFit/>
+          </a:bodyPr>
+          <a:lstStyle/>
+          <a:p>
+            <a:pPr algn="ctr"/>
+            <a:r>
+              <a:rPr sz="1400" i="1">
+                <a:solidFill>
+                  <a:srgbClr val="999999"/>
+                </a:solidFill>
+              </a:rPr>
+              <a:t>（DSH 介面截圖待補）</a:t>
+            </a:r>
+          </a:p>
+        </p:txBody>
+      </p:sp>
     </p:spTree>
   </p:cSld>
   <mc:AlternateContent>
@@ -29471,16 +29443,12 @@
           </a:p>
         </p:txBody>
       </p:sp>
-      <p:pic>
-        <p:nvPicPr>
-          <p:cNvPr id="114" name="圖片 4"/>
-          <p:cNvPicPr/>
+      <p:sp>
+        <p:nvSpPr>
+          <p:cNvPr id="116" name="TextBox 115"/>
+          <p:cNvSpPr txBox="1"/>
           <p:nvPr/>
-        </p:nvPicPr>
-        <p:blipFill>
-          <a:blip r:embed="rId1"/>
-          <a:stretch/>
-        </p:blipFill>
+        </p:nvSpPr>
         <p:spPr>
           <a:xfrm>
             <a:off x="4379760" y="627840"/>
@@ -29490,22 +29458,31 @@
             <a:avLst/>
           </a:prstGeom>
           <a:noFill/>
-          <a:ln w="0">
-            <a:noFill/>
-          </a:ln>
         </p:spPr>
-      </p:pic>
-      <p:pic>
-        <p:nvPicPr>
-          <p:cNvPr id="115" name="圖片 8"/>
-          <p:cNvPicPr/>
+        <p:txBody>
+          <a:bodyPr wrap="square" anchor="ctr">
+            <a:spAutoFit/>
+          </a:bodyPr>
+          <a:lstStyle/>
+          <a:p>
+            <a:pPr algn="ctr"/>
+            <a:r>
+              <a:rPr sz="1400" i="1">
+                <a:solidFill>
+                  <a:srgbClr val="999999"/>
+                </a:solidFill>
+              </a:rPr>
+              <a:t>（DSH 介面截圖待補）</a:t>
+            </a:r>
+          </a:p>
+        </p:txBody>
+      </p:sp>
+      <p:sp>
+        <p:nvSpPr>
+          <p:cNvPr id="117" name="TextBox 116"/>
+          <p:cNvSpPr txBox="1"/>
           <p:nvPr/>
-        </p:nvPicPr>
-        <p:blipFill>
-          <a:blip r:embed="rId2"/>
-          <a:srcRect l="0" t="-3829" r="48241" b="3829"/>
-          <a:stretch/>
-        </p:blipFill>
+        </p:nvSpPr>
         <p:spPr>
           <a:xfrm>
             <a:off x="5629320" y="3886200"/>
@@ -29515,11 +29492,25 @@
             <a:avLst/>
           </a:prstGeom>
           <a:noFill/>
-          <a:ln w="0">
-            <a:noFill/>
-          </a:ln>
         </p:spPr>
-      </p:pic>
+        <p:txBody>
+          <a:bodyPr wrap="square" anchor="ctr">
+            <a:spAutoFit/>
+          </a:bodyPr>
+          <a:lstStyle/>
+          <a:p>
+            <a:pPr algn="ctr"/>
+            <a:r>
+              <a:rPr sz="1400" i="1">
+                <a:solidFill>
+                  <a:srgbClr val="999999"/>
+                </a:solidFill>
+              </a:rPr>
+              <a:t>（DSH 介面截圖待補）</a:t>
+            </a:r>
+          </a:p>
+        </p:txBody>
+      </p:sp>
     </p:spTree>
   </p:cSld>
   <mc:AlternateContent>
@@ -29690,31 +29681,6 @@
           </a:p>
         </p:txBody>
       </p:sp>
-      <p:pic>
-        <p:nvPicPr>
-          <p:cNvPr id="118" name="內容版面配置區 6"/>
-          <p:cNvPicPr/>
-          <p:nvPr/>
-        </p:nvPicPr>
-        <p:blipFill>
-          <a:blip r:embed="rId1"/>
-          <a:srcRect l="28689" t="23455" r="28959" b="11733"/>
-          <a:stretch/>
-        </p:blipFill>
-        <p:spPr>
-          <a:xfrm>
-            <a:off x="1065240" y="1333440"/>
-            <a:ext cx="4911480" cy="2639520"/>
-          </a:xfrm>
-          <a:prstGeom prst="rect">
-            <a:avLst/>
-          </a:prstGeom>
-          <a:noFill/>
-          <a:ln w="0">
-            <a:noFill/>
-          </a:ln>
-        </p:spPr>
-      </p:pic>
       <p:sp>
         <p:nvSpPr>
           <p:cNvPr id="119" name="PlaceHolder 3"/>
@@ -29832,6 +29798,40 @@
               <a:uFillTx/>
               <a:latin typeface="Times New Roman"/>
             </a:endParaRPr>
+          </a:p>
+        </p:txBody>
+      </p:sp>
+      <p:sp>
+        <p:nvSpPr>
+          <p:cNvPr id="121" name="TextBox 120"/>
+          <p:cNvSpPr txBox="1"/>
+          <p:nvPr/>
+        </p:nvSpPr>
+        <p:spPr>
+          <a:xfrm>
+            <a:off x="1065240" y="1333440"/>
+            <a:ext cx="4911480" cy="2639520"/>
+          </a:xfrm>
+          <a:prstGeom prst="rect">
+            <a:avLst/>
+          </a:prstGeom>
+          <a:noFill/>
+        </p:spPr>
+        <p:txBody>
+          <a:bodyPr wrap="square" anchor="ctr">
+            <a:spAutoFit/>
+          </a:bodyPr>
+          <a:lstStyle/>
+          <a:p>
+            <a:pPr algn="ctr"/>
+            <a:r>
+              <a:rPr sz="1400" i="1">
+                <a:solidFill>
+                  <a:srgbClr val="999999"/>
+                </a:solidFill>
+              </a:rPr>
+              <a:t>（DSH 介面截圖待補）</a:t>
+            </a:r>
           </a:p>
         </p:txBody>
       </p:sp>
@@ -29893,136 +29893,9 @@
             <a:normAutofit/>
           </a:bodyPr>
           <a:p>
-            <a:pPr indent="0" algn="l" defTabSz="914400">
-              <a:lnSpc>
-                <a:spcPct val="80000"/>
-              </a:lnSpc>
-              <a:buNone/>
-            </a:pPr>
-            <a:r>
-              <a:rPr lang="zh-TW" sz="3200" b="1" u="none" strike="noStrike">
-                <a:solidFill>
-                  <a:schemeClr val="dk1">
-                    <a:lumMod val="85000"/>
-                    <a:lumOff val="15000"/>
-                  </a:schemeClr>
-                </a:solidFill>
-                <a:effectLst/>
-                <a:uFillTx/>
-                <a:latin typeface="Century Gothic"/>
-              </a:rPr>
-              <a:t>新增工作階段</a:t>
-            </a:r>
-            <a:r>
-              <a:rPr lang="en-US" sz="3200" b="1" u="none" strike="noStrike">
-                <a:solidFill>
-                  <a:schemeClr val="dk1">
-                    <a:lumMod val="85000"/>
-                    <a:lumOff val="15000"/>
-                  </a:schemeClr>
-                </a:solidFill>
-                <a:effectLst/>
-                <a:uFillTx/>
-                <a:latin typeface="Century Gothic"/>
-              </a:rPr>
-              <a:t>=&gt;</a:t>
-            </a:r>
-            <a:r>
-              <a:rPr lang="zh-TW" sz="3200" b="1" u="none" strike="noStrike">
-                <a:solidFill>
-                  <a:schemeClr val="dk1">
-                    <a:lumMod val="85000"/>
-                    <a:lumOff val="15000"/>
-                  </a:schemeClr>
-                </a:solidFill>
-                <a:effectLst/>
-                <a:highlight>
-                  <a:srgbClr val="FFFF00"/>
-                </a:highlight>
-                <a:uFillTx/>
-                <a:latin typeface="Century Gothic"/>
-              </a:rPr>
-              <a:t>提醒</a:t>
-            </a:r>
-            <a:r>
-              <a:rPr lang="en-US" sz="3200" b="1" u="none" strike="noStrike">
-                <a:solidFill>
-                  <a:schemeClr val="dk1">
-                    <a:lumMod val="85000"/>
-                    <a:lumOff val="15000"/>
-                  </a:schemeClr>
-                </a:solidFill>
-                <a:effectLst/>
-                <a:highlight>
-                  <a:srgbClr val="FFFF00"/>
-                </a:highlight>
-                <a:uFillTx/>
-                <a:latin typeface="Century Gothic"/>
-              </a:rPr>
-              <a:t>DSH</a:t>
-            </a:r>
-            <a:r>
-              <a:rPr lang="zh-TW" sz="3200" b="0" u="none" strike="noStrike">
-                <a:solidFill>
-                  <a:schemeClr val="dk1">
-                    <a:lumMod val="85000"/>
-                    <a:lumOff val="15000"/>
-                  </a:schemeClr>
-                </a:solidFill>
-                <a:effectLst/>
-                <a:highlight>
-                  <a:srgbClr val="FFFF00"/>
-                </a:highlight>
-                <a:uFillTx/>
-                <a:latin typeface="Century Gothic"/>
-              </a:rPr>
-              <a:t>用</a:t>
-            </a:r>
-            <a:r>
-              <a:rPr lang="en-US" sz="3200" b="0" u="none" strike="noStrike">
-                <a:solidFill>
-                  <a:schemeClr val="dk1">
-                    <a:lumMod val="85000"/>
-                    <a:lumOff val="15000"/>
-                  </a:schemeClr>
-                </a:solidFill>
-                <a:effectLst/>
-                <a:highlight>
-                  <a:srgbClr val="FFFF00"/>
-                </a:highlight>
-                <a:uFillTx/>
-                <a:latin typeface="Century Gothic"/>
-              </a:rPr>
-              <a:t>wsl~/tw-selfselect/</a:t>
-            </a:r>
-            <a:r>
-              <a:rPr lang="zh-TW" sz="3200" b="0" u="none" strike="noStrike">
-                <a:solidFill>
-                  <a:schemeClr val="dk1">
-                    <a:lumMod val="85000"/>
-                    <a:lumOff val="15000"/>
-                  </a:schemeClr>
-                </a:solidFill>
-                <a:effectLst/>
-                <a:highlight>
-                  <a:srgbClr val="FFFF00"/>
-                </a:highlight>
-                <a:uFillTx/>
-                <a:latin typeface="Century Gothic"/>
-              </a:rPr>
-              <a:t>當工作根目錄</a:t>
-            </a:r>
-            <a:endParaRPr lang="en-US" sz="3200" b="1" u="none" strike="noStrike">
-              <a:solidFill>
-                <a:schemeClr val="dk1">
-                  <a:lumMod val="85000"/>
-                  <a:lumOff val="15000"/>
-                </a:schemeClr>
-              </a:solidFill>
-              <a:effectLst/>
-              <a:uFillTx/>
-              <a:latin typeface="Century Gothic"/>
-            </a:endParaRPr>
+            <a:r>
+              <a:t>新增工作階段：工作根目錄設在 ~/tw-selfselect</a:t>
+            </a:r>
           </a:p>
         </p:txBody>
       </p:sp>
@@ -30104,16 +29977,12 @@
           </a:p>
         </p:txBody>
       </p:sp>
-      <p:pic>
-        <p:nvPicPr>
-          <p:cNvPr id="123" name="內容版面配置區 6"/>
-          <p:cNvPicPr/>
+      <p:sp>
+        <p:nvSpPr>
+          <p:cNvPr id="123" name="TextBox 122"/>
+          <p:cNvSpPr txBox="1"/>
           <p:nvPr/>
-        </p:nvPicPr>
-        <p:blipFill>
-          <a:blip r:embed="rId1"/>
-          <a:stretch/>
-        </p:blipFill>
+        </p:nvSpPr>
         <p:spPr>
           <a:xfrm>
             <a:off x="1330200" y="1219320"/>
@@ -30123,11 +29992,25 @@
             <a:avLst/>
           </a:prstGeom>
           <a:noFill/>
-          <a:ln w="0">
-            <a:noFill/>
-          </a:ln>
         </p:spPr>
-      </p:pic>
+        <p:txBody>
+          <a:bodyPr wrap="square" anchor="ctr">
+            <a:spAutoFit/>
+          </a:bodyPr>
+          <a:lstStyle/>
+          <a:p>
+            <a:pPr algn="ctr"/>
+            <a:r>
+              <a:rPr sz="1400" i="1">
+                <a:solidFill>
+                  <a:srgbClr val="999999"/>
+                </a:solidFill>
+              </a:rPr>
+              <a:t>（DSH 介面截圖待補）</a:t>
+            </a:r>
+          </a:p>
+        </p:txBody>
+      </p:sp>
     </p:spTree>
   </p:cSld>
   <mc:AlternateContent>

--- a/plans/ppt/TW-SELFSELECT台股買賣自動化系統-W3-講稿版.pptx
+++ b/plans/ppt/TW-SELFSELECT台股買賣自動化系統-W3-講稿版.pptx
@@ -6165,6 +6165,33 @@
               <a:buNone/>
             </a:pPr>
             <a:r>
+              <a:rPr lang="zh-TW" sz="2000" b="0" u="none" strike="noStrike">
+                <a:solidFill>
+                  <a:srgbClr val="000000"/>
+                </a:solidFill>
+                <a:effectLst/>
+                <a:uFillTx/>
+                <a:latin typeface="Arial"/>
+              </a:rPr>
+              <a:t>計畫建好之後怎麼執行？確認計畫後 DSH 就會開始執行；過程中有問題直接在對話追加指示，或切回 plan 模式重新規劃。完成後在介面看得到結果；長時間任務可用 goal 讓它分回合續跑，不用一直盯著螢幕。</a:t>
+            </a:r>
+            <a:endParaRPr lang="en-US" sz="2000" b="0" u="none" strike="noStrike">
+              <a:solidFill>
+                <a:srgbClr val="000000"/>
+              </a:solidFill>
+              <a:effectLst/>
+              <a:uFillTx/>
+              <a:latin typeface="Arial"/>
+            </a:endParaRPr>
+          </a:p>
+          <a:p>
+            <a:pPr indent="0" algn="l">
+              <a:lnSpc>
+                <a:spcPct val="100000"/>
+              </a:lnSpc>
+              <a:buNone/>
+            </a:pPr>
+            <a:r>
               <a:rPr lang="en-US" sz="2000" b="0" u="none" strike="noStrike">
                 <a:solidFill>
                   <a:srgbClr val="000000"/>
@@ -6216,7 +6243,7 @@
                 <a:uFillTx/>
                 <a:latin typeface="Arial"/>
               </a:rPr>
-              <a:t>【講師提示】強調「先計畫再動手」是複雜任務的標準流程，跟寫程式前的設計圖概念一樣。</a:t>
+              <a:t>【講師提示】強調「先計畫再動手」是複雜任務的標準流程，跟寫程式前的設計圖概念一樣；現場示範一次「計畫→核准→執行」的完整循環，讓學員看到端到端長什麼樣。</a:t>
             </a:r>
             <a:endParaRPr lang="en-US" sz="2000" b="0" u="none" strike="noStrike">
               <a:solidFill>
